--- a/제안서/변동성하베스트펀드_KOSPI200_초안.pptx
+++ b/제안서/변동성하베스트펀드_KOSPI200_초안.pptx
@@ -13367,7 +13367,7 @@
                 </a:solidFill>
                 <a:latin typeface="맑은 고딕"/>
               </a:rPr>
-              <a:t>최근</a:t>
+              <a:t>한국시장 변동성이 최근 5년 중 최고 수준입니다(2026-07-10 기준, 60영업일 연율화). 변동성이 클수록 변동성 매매의 수익 기회가 커집니다.</a:t>
             </a:r>
             <a:r>
               <a:rPr sz="1300" b="1" dirty="0">
@@ -13376,7 +13376,7 @@
                 </a:solidFill>
                 <a:latin typeface="맑은 고딕"/>
               </a:rPr>
-              <a:t> </a:t>
+              <a:t/>
             </a:r>
             <a:r>
               <a:rPr sz="1300" b="1" dirty="0" err="1">
@@ -13385,7 +13385,7 @@
                 </a:solidFill>
                 <a:latin typeface="맑은 고딕"/>
               </a:rPr>
-              <a:t>한국시장</a:t>
+              <a:t/>
             </a:r>
             <a:r>
               <a:rPr sz="1300" b="1" dirty="0">
@@ -13394,7 +13394,7 @@
                 </a:solidFill>
                 <a:latin typeface="맑은 고딕"/>
               </a:rPr>
-              <a:t> </a:t>
+              <a:t/>
             </a:r>
             <a:r>
               <a:rPr sz="1300" b="1" dirty="0" err="1">
@@ -13403,7 +13403,7 @@
                 </a:solidFill>
                 <a:latin typeface="맑은 고딕"/>
               </a:rPr>
-              <a:t>변동성이</a:t>
+              <a:t/>
             </a:r>
             <a:r>
               <a:rPr sz="1300" b="1" dirty="0">
@@ -13412,7 +13412,7 @@
                 </a:solidFill>
                 <a:latin typeface="맑은 고딕"/>
               </a:rPr>
-              <a:t> 5년 내 </a:t>
+              <a:t/>
             </a:r>
             <a:r>
               <a:rPr sz="1300" b="1" dirty="0" err="1">
@@ -13421,7 +13421,7 @@
                 </a:solidFill>
                 <a:latin typeface="맑은 고딕"/>
               </a:rPr>
-              <a:t>최고</a:t>
+              <a:t/>
             </a:r>
             <a:r>
               <a:rPr sz="1300" b="1" dirty="0">
@@ -13430,7 +13430,7 @@
                 </a:solidFill>
                 <a:latin typeface="맑은 고딕"/>
               </a:rPr>
-              <a:t> </a:t>
+              <a:t/>
             </a:r>
             <a:r>
               <a:rPr sz="1300" b="1" dirty="0" err="1">
@@ -13439,7 +13439,7 @@
                 </a:solidFill>
                 <a:latin typeface="맑은 고딕"/>
               </a:rPr>
-              <a:t>수준</a:t>
+              <a:t/>
             </a:r>
             <a:r>
               <a:rPr sz="1300" b="1" dirty="0">
@@ -13448,7 +13448,7 @@
                 </a:solidFill>
                 <a:latin typeface="맑은 고딕"/>
               </a:rPr>
-              <a:t>(99.7%ile). </a:t>
+              <a:t/>
             </a:r>
             <a:r>
               <a:rPr sz="1300" b="1" dirty="0" err="1">
@@ -13457,7 +13457,7 @@
                 </a:solidFill>
                 <a:latin typeface="맑은 고딕"/>
               </a:rPr>
-              <a:t>변동성이</a:t>
+              <a:t/>
             </a:r>
             <a:r>
               <a:rPr sz="1300" b="1" dirty="0">
@@ -13466,7 +13466,7 @@
                 </a:solidFill>
                 <a:latin typeface="맑은 고딕"/>
               </a:rPr>
-              <a:t> </a:t>
+              <a:t/>
             </a:r>
             <a:r>
               <a:rPr sz="1300" b="1" dirty="0" err="1">
@@ -13475,7 +13475,7 @@
                 </a:solidFill>
                 <a:latin typeface="맑은 고딕"/>
               </a:rPr>
-              <a:t>클수록</a:t>
+              <a:t/>
             </a:r>
             <a:r>
               <a:rPr sz="1300" b="1" dirty="0">
@@ -13484,7 +13484,7 @@
                 </a:solidFill>
                 <a:latin typeface="맑은 고딕"/>
               </a:rPr>
-              <a:t> </a:t>
+              <a:t/>
             </a:r>
             <a:r>
               <a:rPr sz="1300" b="1" dirty="0" err="1">
@@ -13493,7 +13493,7 @@
                 </a:solidFill>
                 <a:latin typeface="맑은 고딕"/>
               </a:rPr>
-              <a:t>변동성</a:t>
+              <a:t/>
             </a:r>
             <a:r>
               <a:rPr sz="1300" b="1" dirty="0">
@@ -13502,7 +13502,7 @@
                 </a:solidFill>
                 <a:latin typeface="맑은 고딕"/>
               </a:rPr>
-              <a:t> </a:t>
+              <a:t/>
             </a:r>
             <a:r>
               <a:rPr sz="1300" b="1" dirty="0" err="1">
@@ -13511,7 +13511,7 @@
                 </a:solidFill>
                 <a:latin typeface="맑은 고딕"/>
               </a:rPr>
-              <a:t>매매의</a:t>
+              <a:t/>
             </a:r>
             <a:r>
               <a:rPr sz="1300" b="1" dirty="0">
@@ -13520,7 +13520,7 @@
                 </a:solidFill>
                 <a:latin typeface="맑은 고딕"/>
               </a:rPr>
-              <a:t> </a:t>
+              <a:t/>
             </a:r>
             <a:r>
               <a:rPr sz="1300" b="1" dirty="0" err="1">
@@ -13529,7 +13529,7 @@
                 </a:solidFill>
                 <a:latin typeface="맑은 고딕"/>
               </a:rPr>
-              <a:t>수익</a:t>
+              <a:t/>
             </a:r>
             <a:r>
               <a:rPr sz="1300" b="1" dirty="0">
@@ -13538,7 +13538,7 @@
                 </a:solidFill>
                 <a:latin typeface="맑은 고딕"/>
               </a:rPr>
-              <a:t> </a:t>
+              <a:t/>
             </a:r>
             <a:r>
               <a:rPr sz="1300" b="1" dirty="0" err="1">
@@ -13547,7 +13547,7 @@
                 </a:solidFill>
                 <a:latin typeface="맑은 고딕"/>
               </a:rPr>
-              <a:t>기회가</a:t>
+              <a:t/>
             </a:r>
             <a:r>
               <a:rPr sz="1300" b="1" dirty="0">
@@ -13556,7 +13556,7 @@
                 </a:solidFill>
                 <a:latin typeface="맑은 고딕"/>
               </a:rPr>
-              <a:t> </a:t>
+              <a:t/>
             </a:r>
             <a:r>
               <a:rPr sz="1300" b="1" dirty="0" err="1">
@@ -13565,7 +13565,7 @@
                 </a:solidFill>
                 <a:latin typeface="맑은 고딕"/>
               </a:rPr>
-              <a:t>커집니다</a:t>
+              <a:t/>
             </a:r>
             <a:r>
               <a:rPr sz="1300" b="1" dirty="0">
@@ -13574,7 +13574,7 @@
                 </a:solidFill>
                 <a:latin typeface="맑은 고딕"/>
               </a:rPr>
-              <a:t>.</a:t>
+              <a:t/>
             </a:r>
           </a:p>
         </p:txBody>

--- a/제안서/변동성하베스트펀드_KOSPI200_초안.pptx
+++ b/제안서/변동성하베스트펀드_KOSPI200_초안.pptx
@@ -13342,7 +13342,7 @@
         <p:spPr>
           <a:xfrm>
             <a:off x="685800" y="1082767"/>
-            <a:ext cx="8686800" cy="365760"/>
+            <a:ext cx="8686800" cy="225703"/>
           </a:xfrm>
           <a:prstGeom prst="rect">
             <a:avLst/>
@@ -13367,7 +13367,7 @@
                 </a:solidFill>
                 <a:latin typeface="맑은 고딕"/>
               </a:rPr>
-              <a:t>한국시장 변동성이 최근 5년 중 최고 수준입니다(2026-07-10 기준, 60영업일 연율화). 변동성이 클수록 변동성 매매의 수익 기회가 커집니다.</a:t>
+              <a:t>한국시장</a:t>
             </a:r>
             <a:r>
               <a:rPr sz="1300" b="1" dirty="0">
@@ -13376,7 +13376,7 @@
                 </a:solidFill>
                 <a:latin typeface="맑은 고딕"/>
               </a:rPr>
-              <a:t/>
+              <a:t> </a:t>
             </a:r>
             <a:r>
               <a:rPr sz="1300" b="1" dirty="0" err="1">
@@ -13385,7 +13385,7 @@
                 </a:solidFill>
                 <a:latin typeface="맑은 고딕"/>
               </a:rPr>
-              <a:t/>
+              <a:t>변동성이</a:t>
             </a:r>
             <a:r>
               <a:rPr sz="1300" b="1" dirty="0">
@@ -13394,7 +13394,7 @@
                 </a:solidFill>
                 <a:latin typeface="맑은 고딕"/>
               </a:rPr>
-              <a:t/>
+              <a:t> </a:t>
             </a:r>
             <a:r>
               <a:rPr sz="1300" b="1" dirty="0" err="1">
@@ -13403,7 +13403,7 @@
                 </a:solidFill>
                 <a:latin typeface="맑은 고딕"/>
               </a:rPr>
-              <a:t/>
+              <a:t>최근</a:t>
             </a:r>
             <a:r>
               <a:rPr sz="1300" b="1" dirty="0">
@@ -13412,7 +13412,7 @@
                 </a:solidFill>
                 <a:latin typeface="맑은 고딕"/>
               </a:rPr>
-              <a:t/>
+              <a:t> 5년 중 </a:t>
             </a:r>
             <a:r>
               <a:rPr sz="1300" b="1" dirty="0" err="1">
@@ -13421,7 +13421,7 @@
                 </a:solidFill>
                 <a:latin typeface="맑은 고딕"/>
               </a:rPr>
-              <a:t/>
+              <a:t>최고</a:t>
             </a:r>
             <a:r>
               <a:rPr sz="1300" b="1" dirty="0">
@@ -13430,7 +13430,7 @@
                 </a:solidFill>
                 <a:latin typeface="맑은 고딕"/>
               </a:rPr>
-              <a:t/>
+              <a:t> </a:t>
             </a:r>
             <a:r>
               <a:rPr sz="1300" b="1" dirty="0" err="1">
@@ -13439,7 +13439,16 @@
                 </a:solidFill>
                 <a:latin typeface="맑은 고딕"/>
               </a:rPr>
-              <a:t/>
+              <a:t>수준입니다</a:t>
+            </a:r>
+            <a:r>
+              <a:rPr lang="en-US" sz="1300" b="1" dirty="0">
+                <a:solidFill>
+                  <a:srgbClr val="3A3A3A"/>
+                </a:solidFill>
+                <a:latin typeface="맑은 고딕"/>
+              </a:rPr>
+              <a:t>.</a:t>
             </a:r>
             <a:r>
               <a:rPr sz="1300" b="1" dirty="0">
@@ -13448,7 +13457,7 @@
                 </a:solidFill>
                 <a:latin typeface="맑은 고딕"/>
               </a:rPr>
-              <a:t/>
+              <a:t> </a:t>
             </a:r>
             <a:r>
               <a:rPr sz="1300" b="1" dirty="0" err="1">
@@ -13457,124 +13466,7 @@
                 </a:solidFill>
                 <a:latin typeface="맑은 고딕"/>
               </a:rPr>
-              <a:t/>
-            </a:r>
-            <a:r>
-              <a:rPr sz="1300" b="1" dirty="0">
-                <a:solidFill>
-                  <a:srgbClr val="3A3A3A"/>
-                </a:solidFill>
-                <a:latin typeface="맑은 고딕"/>
-              </a:rPr>
-              <a:t/>
-            </a:r>
-            <a:r>
-              <a:rPr sz="1300" b="1" dirty="0" err="1">
-                <a:solidFill>
-                  <a:srgbClr val="3A3A3A"/>
-                </a:solidFill>
-                <a:latin typeface="맑은 고딕"/>
-              </a:rPr>
-              <a:t/>
-            </a:r>
-            <a:r>
-              <a:rPr sz="1300" b="1" dirty="0">
-                <a:solidFill>
-                  <a:srgbClr val="3A3A3A"/>
-                </a:solidFill>
-                <a:latin typeface="맑은 고딕"/>
-              </a:rPr>
-              <a:t/>
-            </a:r>
-            <a:r>
-              <a:rPr sz="1300" b="1" dirty="0" err="1">
-                <a:solidFill>
-                  <a:srgbClr val="3A3A3A"/>
-                </a:solidFill>
-                <a:latin typeface="맑은 고딕"/>
-              </a:rPr>
-              <a:t/>
-            </a:r>
-            <a:r>
-              <a:rPr sz="1300" b="1" dirty="0">
-                <a:solidFill>
-                  <a:srgbClr val="3A3A3A"/>
-                </a:solidFill>
-                <a:latin typeface="맑은 고딕"/>
-              </a:rPr>
-              <a:t/>
-            </a:r>
-            <a:r>
-              <a:rPr sz="1300" b="1" dirty="0" err="1">
-                <a:solidFill>
-                  <a:srgbClr val="3A3A3A"/>
-                </a:solidFill>
-                <a:latin typeface="맑은 고딕"/>
-              </a:rPr>
-              <a:t/>
-            </a:r>
-            <a:r>
-              <a:rPr sz="1300" b="1" dirty="0">
-                <a:solidFill>
-                  <a:srgbClr val="3A3A3A"/>
-                </a:solidFill>
-                <a:latin typeface="맑은 고딕"/>
-              </a:rPr>
-              <a:t/>
-            </a:r>
-            <a:r>
-              <a:rPr sz="1300" b="1" dirty="0" err="1">
-                <a:solidFill>
-                  <a:srgbClr val="3A3A3A"/>
-                </a:solidFill>
-                <a:latin typeface="맑은 고딕"/>
-              </a:rPr>
-              <a:t/>
-            </a:r>
-            <a:r>
-              <a:rPr sz="1300" b="1" dirty="0">
-                <a:solidFill>
-                  <a:srgbClr val="3A3A3A"/>
-                </a:solidFill>
-                <a:latin typeface="맑은 고딕"/>
-              </a:rPr>
-              <a:t/>
-            </a:r>
-            <a:r>
-              <a:rPr sz="1300" b="1" dirty="0" err="1">
-                <a:solidFill>
-                  <a:srgbClr val="3A3A3A"/>
-                </a:solidFill>
-                <a:latin typeface="맑은 고딕"/>
-              </a:rPr>
-              <a:t/>
-            </a:r>
-            <a:r>
-              <a:rPr sz="1300" b="1" dirty="0">
-                <a:solidFill>
-                  <a:srgbClr val="3A3A3A"/>
-                </a:solidFill>
-                <a:latin typeface="맑은 고딕"/>
-              </a:rPr>
-              <a:t/>
-            </a:r>
-            <a:r>
-              <a:rPr sz="1300" b="1" dirty="0" err="1">
-                <a:solidFill>
-                  <a:srgbClr val="3A3A3A"/>
-                </a:solidFill>
-                <a:latin typeface="맑은 고딕"/>
-              </a:rPr>
-              <a:t/>
-            </a:r>
-            <a:r>
-              <a:rPr sz="1300" b="1" dirty="0">
-                <a:solidFill>
-                  <a:srgbClr val="3A3A3A"/>
-                </a:solidFill>
-                <a:latin typeface="맑은 고딕"/>
-              </a:rPr>
-              <a:t/>
+              <a:t>변동성이 클수록 변동성 매매의 수익 기회가 커집니다.</a:t>
             </a:r>
           </a:p>
         </p:txBody>
@@ -14594,7 +14486,7 @@
         <p:spPr>
           <a:xfrm>
             <a:off x="868680" y="4590288"/>
-            <a:ext cx="8138160" cy="713232"/>
+            <a:ext cx="8138160" cy="399533"/>
           </a:xfrm>
           <a:prstGeom prst="rect">
             <a:avLst/>
@@ -14613,22 +14505,193 @@
               </a:lnSpc>
             </a:pPr>
             <a:r>
-              <a:rPr sz="1250" b="1">
+              <a:rPr sz="1250" b="1" dirty="0">
                 <a:solidFill>
                   <a:srgbClr val="1F9E6E"/>
                 </a:solidFill>
                 <a:latin typeface="맑은 고딕"/>
               </a:rPr>
-              <a:t>② 하방을 받치는 밸류에이션: </a:t>
-            </a:r>
-            <a:r>
-              <a:rPr sz="1250" b="1">
+              <a:t>② </a:t>
+            </a:r>
+            <a:r>
+              <a:rPr sz="1250" b="1" dirty="0" err="1">
+                <a:solidFill>
+                  <a:srgbClr val="1F9E6E"/>
+                </a:solidFill>
+                <a:latin typeface="맑은 고딕"/>
+              </a:rPr>
+              <a:t>하방을</a:t>
+            </a:r>
+            <a:r>
+              <a:rPr sz="1250" b="1" dirty="0">
+                <a:solidFill>
+                  <a:srgbClr val="1F9E6E"/>
+                </a:solidFill>
+                <a:latin typeface="맑은 고딕"/>
+              </a:rPr>
+              <a:t> </a:t>
+            </a:r>
+            <a:r>
+              <a:rPr sz="1250" b="1" dirty="0" err="1">
+                <a:solidFill>
+                  <a:srgbClr val="1F9E6E"/>
+                </a:solidFill>
+                <a:latin typeface="맑은 고딕"/>
+              </a:rPr>
+              <a:t>받치는</a:t>
+            </a:r>
+            <a:r>
+              <a:rPr sz="1250" b="1" dirty="0">
+                <a:solidFill>
+                  <a:srgbClr val="1F9E6E"/>
+                </a:solidFill>
+                <a:latin typeface="맑은 고딕"/>
+              </a:rPr>
+              <a:t> </a:t>
+            </a:r>
+            <a:r>
+              <a:rPr sz="1250" b="1" dirty="0" err="1">
+                <a:solidFill>
+                  <a:srgbClr val="1F9E6E"/>
+                </a:solidFill>
+                <a:latin typeface="맑은 고딕"/>
+              </a:rPr>
+              <a:t>밸류에이션</a:t>
+            </a:r>
+            <a:r>
+              <a:rPr lang="en-US" sz="1250" b="1" dirty="0">
+                <a:solidFill>
+                  <a:srgbClr val="1F9E6E"/>
+                </a:solidFill>
+                <a:latin typeface="맑은 고딕"/>
+              </a:rPr>
+              <a:t> </a:t>
+            </a:r>
+            <a:r>
+              <a:rPr lang="ko-KR" altLang="en-US" sz="1250" b="1" dirty="0">
+                <a:solidFill>
+                  <a:srgbClr val="1F9E6E"/>
+                </a:solidFill>
+                <a:latin typeface="맑은 고딕"/>
+              </a:rPr>
+              <a:t>및 </a:t>
+            </a:r>
+            <a:r>
+              <a:rPr lang="ko-KR" altLang="en-US" sz="1250" b="1" dirty="0" err="1">
+                <a:solidFill>
+                  <a:srgbClr val="1F9E6E"/>
+                </a:solidFill>
+                <a:latin typeface="맑은 고딕"/>
+              </a:rPr>
+              <a:t>실적상향</a:t>
+            </a:r>
+            <a:r>
+              <a:rPr sz="1250" b="1" dirty="0">
+                <a:solidFill>
+                  <a:srgbClr val="1F9E6E"/>
+                </a:solidFill>
+                <a:latin typeface="맑은 고딕"/>
+              </a:rPr>
+              <a:t>: </a:t>
+            </a:r>
+            <a:r>
+              <a:rPr sz="1250" b="1" dirty="0">
                 <a:solidFill>
                   <a:srgbClr val="3A3A3A"/>
                 </a:solidFill>
                 <a:latin typeface="맑은 고딕"/>
               </a:rPr>
-              <a:t>KOSPI 저평가 — 글로벌 대비 낮은 PER·PBR</a:t>
+              <a:t>KOSPI</a:t>
+            </a:r>
+            <a:r>
+              <a:rPr lang="en-US" sz="1250" b="1" dirty="0">
+                <a:solidFill>
+                  <a:srgbClr val="3A3A3A"/>
+                </a:solidFill>
+                <a:latin typeface="맑은 고딕"/>
+              </a:rPr>
+              <a:t>200</a:t>
+            </a:r>
+            <a:r>
+              <a:rPr sz="1250" b="1" dirty="0">
+                <a:solidFill>
+                  <a:srgbClr val="3A3A3A"/>
+                </a:solidFill>
+                <a:latin typeface="맑은 고딕"/>
+              </a:rPr>
+              <a:t> </a:t>
+            </a:r>
+            <a:r>
+              <a:rPr sz="1250" b="1" dirty="0" err="1">
+                <a:solidFill>
+                  <a:srgbClr val="3A3A3A"/>
+                </a:solidFill>
+                <a:latin typeface="맑은 고딕"/>
+              </a:rPr>
+              <a:t>저평가</a:t>
+            </a:r>
+            <a:r>
+              <a:rPr sz="1250" b="1" dirty="0">
+                <a:solidFill>
+                  <a:srgbClr val="3A3A3A"/>
+                </a:solidFill>
+                <a:latin typeface="맑은 고딕"/>
+              </a:rPr>
+              <a:t> — </a:t>
+            </a:r>
+            <a:r>
+              <a:rPr sz="1250" b="1" dirty="0" err="1">
+                <a:solidFill>
+                  <a:srgbClr val="3A3A3A"/>
+                </a:solidFill>
+                <a:latin typeface="맑은 고딕"/>
+              </a:rPr>
+              <a:t>글로벌</a:t>
+            </a:r>
+            <a:r>
+              <a:rPr sz="1250" b="1" dirty="0">
+                <a:solidFill>
+                  <a:srgbClr val="3A3A3A"/>
+                </a:solidFill>
+                <a:latin typeface="맑은 고딕"/>
+              </a:rPr>
+              <a:t> </a:t>
+            </a:r>
+            <a:r>
+              <a:rPr sz="1250" b="1" dirty="0" err="1">
+                <a:solidFill>
+                  <a:srgbClr val="3A3A3A"/>
+                </a:solidFill>
+                <a:latin typeface="맑은 고딕"/>
+              </a:rPr>
+              <a:t>대비</a:t>
+            </a:r>
+            <a:r>
+              <a:rPr sz="1250" b="1" dirty="0">
+                <a:solidFill>
+                  <a:srgbClr val="3A3A3A"/>
+                </a:solidFill>
+                <a:latin typeface="맑은 고딕"/>
+              </a:rPr>
+              <a:t> </a:t>
+            </a:r>
+            <a:r>
+              <a:rPr sz="1250" b="1" dirty="0" err="1">
+                <a:solidFill>
+                  <a:srgbClr val="3A3A3A"/>
+                </a:solidFill>
+                <a:latin typeface="맑은 고딕"/>
+              </a:rPr>
+              <a:t>낮은</a:t>
+            </a:r>
+            <a:r>
+              <a:rPr sz="1250" b="1" dirty="0">
+                <a:solidFill>
+                  <a:srgbClr val="3A3A3A"/>
+                </a:solidFill>
+                <a:latin typeface="맑은 고딕"/>
+              </a:rPr>
+              <a:t> PER·PBR</a:t>
             </a:r>
           </a:p>
           <a:p>
@@ -14638,14 +14701,137 @@
               </a:lnSpc>
             </a:pPr>
             <a:r>
-              <a:rPr sz="950" b="0">
+              <a:rPr sz="950" b="0" dirty="0">
                 <a:solidFill>
                   <a:srgbClr val="84888B"/>
                 </a:solidFill>
                 <a:latin typeface="맑은 고딕"/>
               </a:rPr>
-              <a:t>   ※ 세부 밸류에이션 수치는 별도 보고서 반영 예정</a:t>
-            </a:r>
+              <a:t>   ※ </a:t>
+            </a:r>
+            <a:r>
+              <a:rPr sz="950" b="0" dirty="0" err="1">
+                <a:solidFill>
+                  <a:srgbClr val="84888B"/>
+                </a:solidFill>
+                <a:latin typeface="맑은 고딕"/>
+              </a:rPr>
+              <a:t>세부</a:t>
+            </a:r>
+            <a:r>
+              <a:rPr sz="950" b="0" dirty="0">
+                <a:solidFill>
+                  <a:srgbClr val="84888B"/>
+                </a:solidFill>
+                <a:latin typeface="맑은 고딕"/>
+              </a:rPr>
+              <a:t> </a:t>
+            </a:r>
+            <a:r>
+              <a:rPr sz="950" b="0" dirty="0" err="1">
+                <a:solidFill>
+                  <a:srgbClr val="84888B"/>
+                </a:solidFill>
+                <a:latin typeface="맑은 고딕"/>
+              </a:rPr>
+              <a:t>밸류에이션</a:t>
+            </a:r>
+            <a:r>
+              <a:rPr sz="950" b="0" dirty="0">
+                <a:solidFill>
+                  <a:srgbClr val="84888B"/>
+                </a:solidFill>
+                <a:latin typeface="맑은 고딕"/>
+              </a:rPr>
+              <a:t> </a:t>
+            </a:r>
+            <a:r>
+              <a:rPr sz="950" b="0" dirty="0" err="1">
+                <a:solidFill>
+                  <a:srgbClr val="84888B"/>
+                </a:solidFill>
+                <a:latin typeface="맑은 고딕"/>
+              </a:rPr>
+              <a:t>수치는</a:t>
+            </a:r>
+            <a:r>
+              <a:rPr sz="950" b="0" dirty="0">
+                <a:solidFill>
+                  <a:srgbClr val="84888B"/>
+                </a:solidFill>
+                <a:latin typeface="맑은 고딕"/>
+              </a:rPr>
+              <a:t> </a:t>
+            </a:r>
+            <a:r>
+              <a:rPr sz="950" b="0" dirty="0" err="1">
+                <a:solidFill>
+                  <a:srgbClr val="84888B"/>
+                </a:solidFill>
+                <a:latin typeface="맑은 고딕"/>
+              </a:rPr>
+              <a:t>별도</a:t>
+            </a:r>
+            <a:r>
+              <a:rPr sz="950" b="0" dirty="0">
+                <a:solidFill>
+                  <a:srgbClr val="84888B"/>
+                </a:solidFill>
+                <a:latin typeface="맑은 고딕"/>
+              </a:rPr>
+              <a:t> </a:t>
+            </a:r>
+            <a:r>
+              <a:rPr sz="950" b="0" dirty="0" err="1">
+                <a:solidFill>
+                  <a:srgbClr val="84888B"/>
+                </a:solidFill>
+                <a:latin typeface="맑은 고딕"/>
+              </a:rPr>
+              <a:t>보고서</a:t>
+            </a:r>
+            <a:r>
+              <a:rPr sz="950" b="0" dirty="0">
+                <a:solidFill>
+                  <a:srgbClr val="84888B"/>
+                </a:solidFill>
+                <a:latin typeface="맑은 고딕"/>
+              </a:rPr>
+              <a:t> </a:t>
+            </a:r>
+            <a:r>
+              <a:rPr sz="950" b="0" dirty="0" err="1">
+                <a:solidFill>
+                  <a:srgbClr val="84888B"/>
+                </a:solidFill>
+                <a:latin typeface="맑은 고딕"/>
+              </a:rPr>
+              <a:t>반영</a:t>
+            </a:r>
+            <a:r>
+              <a:rPr sz="950" b="0" dirty="0">
+                <a:solidFill>
+                  <a:srgbClr val="84888B"/>
+                </a:solidFill>
+                <a:latin typeface="맑은 고딕"/>
+              </a:rPr>
+              <a:t> </a:t>
+            </a:r>
+            <a:r>
+              <a:rPr sz="950" b="0" dirty="0" err="1">
+                <a:solidFill>
+                  <a:srgbClr val="84888B"/>
+                </a:solidFill>
+                <a:latin typeface="맑은 고딕"/>
+              </a:rPr>
+              <a:t>예정</a:t>
+            </a:r>
+            <a:endParaRPr sz="950" b="0" dirty="0">
+              <a:solidFill>
+                <a:srgbClr val="84888B"/>
+              </a:solidFill>
+              <a:latin typeface="맑은 고딕"/>
+            </a:endParaRPr>
           </a:p>
         </p:txBody>
       </p:sp>
@@ -14844,7 +15030,7 @@
         </p:nvSpPr>
         <p:spPr>
           <a:xfrm>
-            <a:off x="0" y="0"/>
+            <a:off x="0" y="-88085"/>
             <a:ext cx="9875520" cy="6858000"/>
           </a:xfrm>
           <a:prstGeom prst="rect">
@@ -14934,7 +15120,7 @@
         </p:nvSpPr>
         <p:spPr>
           <a:xfrm>
-            <a:off x="685800" y="457200"/>
+            <a:off x="585216" y="266729"/>
             <a:ext cx="8229600" cy="320040"/>
           </a:xfrm>
           <a:prstGeom prst="rect">
@@ -14954,7 +15140,7 @@
               </a:lnSpc>
             </a:pPr>
             <a:r>
-              <a:rPr sz="1200" b="1">
+              <a:rPr sz="1200" b="1" dirty="0">
                 <a:solidFill>
                   <a:srgbClr val="F58220"/>
                 </a:solidFill>
@@ -14973,7 +15159,7 @@
         </p:nvSpPr>
         <p:spPr>
           <a:xfrm>
-            <a:off x="685800" y="731520"/>
+            <a:off x="685800" y="567096"/>
             <a:ext cx="8686800" cy="502920"/>
           </a:xfrm>
           <a:prstGeom prst="rect">
@@ -14993,14 +15179,101 @@
               </a:lnSpc>
             </a:pPr>
             <a:r>
-              <a:rPr sz="2300" b="1">
+              <a:rPr sz="2300" b="1" dirty="0">
                 <a:solidFill>
                   <a:srgbClr val="043B72"/>
                 </a:solidFill>
                 <a:latin typeface="맑은 고딕"/>
               </a:rPr>
-              <a:t>왜 지금 이 펀드인가 ③ — 레버리지가 키운 변동성</a:t>
-            </a:r>
+              <a:t>왜 </a:t>
+            </a:r>
+            <a:r>
+              <a:rPr sz="2300" b="1" dirty="0" err="1">
+                <a:solidFill>
+                  <a:srgbClr val="043B72"/>
+                </a:solidFill>
+                <a:latin typeface="맑은 고딕"/>
+              </a:rPr>
+              <a:t>지금</a:t>
+            </a:r>
+            <a:r>
+              <a:rPr sz="2300" b="1" dirty="0">
+                <a:solidFill>
+                  <a:srgbClr val="043B72"/>
+                </a:solidFill>
+                <a:latin typeface="맑은 고딕"/>
+              </a:rPr>
+              <a:t> 이 </a:t>
+            </a:r>
+            <a:r>
+              <a:rPr sz="2300" b="1" dirty="0" err="1">
+                <a:solidFill>
+                  <a:srgbClr val="043B72"/>
+                </a:solidFill>
+                <a:latin typeface="맑은 고딕"/>
+              </a:rPr>
+              <a:t>펀드인가</a:t>
+            </a:r>
+            <a:r>
+              <a:rPr sz="2300" b="1" dirty="0">
+                <a:solidFill>
+                  <a:srgbClr val="043B72"/>
+                </a:solidFill>
+                <a:latin typeface="맑은 고딕"/>
+              </a:rPr>
+              <a:t> ③ — </a:t>
+            </a:r>
+            <a:r>
+              <a:rPr sz="2300" b="1" dirty="0" err="1">
+                <a:solidFill>
+                  <a:srgbClr val="043B72"/>
+                </a:solidFill>
+                <a:latin typeface="맑은 고딕"/>
+              </a:rPr>
+              <a:t>레버리지가</a:t>
+            </a:r>
+            <a:r>
+              <a:rPr sz="2300" b="1" dirty="0">
+                <a:solidFill>
+                  <a:srgbClr val="043B72"/>
+                </a:solidFill>
+                <a:latin typeface="맑은 고딕"/>
+              </a:rPr>
+              <a:t> </a:t>
+            </a:r>
+            <a:r>
+              <a:rPr sz="2300" b="1" dirty="0" err="1">
+                <a:solidFill>
+                  <a:srgbClr val="043B72"/>
+                </a:solidFill>
+                <a:latin typeface="맑은 고딕"/>
+              </a:rPr>
+              <a:t>키운</a:t>
+            </a:r>
+            <a:r>
+              <a:rPr sz="2300" b="1" dirty="0">
+                <a:solidFill>
+                  <a:srgbClr val="043B72"/>
+                </a:solidFill>
+                <a:latin typeface="맑은 고딕"/>
+              </a:rPr>
+              <a:t> </a:t>
+            </a:r>
+            <a:r>
+              <a:rPr sz="2300" b="1" dirty="0" err="1">
+                <a:solidFill>
+                  <a:srgbClr val="043B72"/>
+                </a:solidFill>
+                <a:latin typeface="맑은 고딕"/>
+              </a:rPr>
+              <a:t>변동성</a:t>
+            </a:r>
+            <a:endParaRPr sz="2300" b="1" dirty="0">
+              <a:solidFill>
+                <a:srgbClr val="043B72"/>
+              </a:solidFill>
+              <a:latin typeface="맑은 고딕"/>
+            </a:endParaRPr>
           </a:p>
         </p:txBody>
       </p:sp>
@@ -15012,7 +15285,7 @@
         </p:nvSpPr>
         <p:spPr>
           <a:xfrm>
-            <a:off x="685800" y="960120"/>
+            <a:off x="685800" y="1070184"/>
             <a:ext cx="8686800" cy="365760"/>
           </a:xfrm>
           <a:prstGeom prst="rect">
@@ -15032,13 +15305,166 @@
               </a:lnSpc>
             </a:pPr>
             <a:r>
-              <a:rPr sz="1300" b="1">
+              <a:rPr sz="1300" b="1" dirty="0" err="1">
                 <a:solidFill>
                   <a:srgbClr val="3A3A3A"/>
                 </a:solidFill>
                 <a:latin typeface="맑은 고딕"/>
               </a:rPr>
-              <a:t>단일종목 레버리지 ETF 급증이 삼성전자·SK하이닉스와 지수 변동성을 구조적으로 키우고 있습니다.</a:t>
+              <a:t>국내·해외(홍콩 CSOP 등) 레버리지 ETF 약 40조원(6/30 기준)이 삼성전자·SK하이닉스와 지수 변동성을 구조적으로 키우고 있습니다.</a:t>
+            </a:r>
+            <a:r>
+              <a:rPr sz="1300" b="1" dirty="0">
+                <a:solidFill>
+                  <a:srgbClr val="3A3A3A"/>
+                </a:solidFill>
+                <a:latin typeface="맑은 고딕"/>
+              </a:rPr>
+              <a:t/>
+            </a:r>
+            <a:r>
+              <a:rPr sz="1300" b="1" dirty="0" err="1">
+                <a:solidFill>
+                  <a:srgbClr val="3A3A3A"/>
+                </a:solidFill>
+                <a:latin typeface="맑은 고딕"/>
+              </a:rPr>
+              <a:t/>
+            </a:r>
+            <a:r>
+              <a:rPr sz="1300" b="1" dirty="0">
+                <a:solidFill>
+                  <a:srgbClr val="3A3A3A"/>
+                </a:solidFill>
+                <a:latin typeface="맑은 고딕"/>
+              </a:rPr>
+              <a:t/>
+            </a:r>
+            <a:r>
+              <a:rPr sz="1300" b="1" dirty="0" err="1">
+                <a:solidFill>
+                  <a:srgbClr val="3A3A3A"/>
+                </a:solidFill>
+                <a:latin typeface="맑은 고딕"/>
+              </a:rPr>
+              <a:t/>
+            </a:r>
+            <a:r>
+              <a:rPr sz="1300" b="1" dirty="0">
+                <a:solidFill>
+                  <a:srgbClr val="3A3A3A"/>
+                </a:solidFill>
+                <a:latin typeface="맑은 고딕"/>
+              </a:rPr>
+              <a:t/>
+            </a:r>
+            <a:r>
+              <a:rPr sz="1300" b="1" dirty="0" err="1">
+                <a:solidFill>
+                  <a:srgbClr val="3A3A3A"/>
+                </a:solidFill>
+                <a:latin typeface="맑은 고딕"/>
+              </a:rPr>
+              <a:t/>
+            </a:r>
+            <a:r>
+              <a:rPr sz="1300" b="1" dirty="0">
+                <a:solidFill>
+                  <a:srgbClr val="3A3A3A"/>
+                </a:solidFill>
+                <a:latin typeface="맑은 고딕"/>
+              </a:rPr>
+              <a:t/>
+            </a:r>
+            <a:r>
+              <a:rPr sz="1300" b="1" dirty="0" err="1">
+                <a:solidFill>
+                  <a:srgbClr val="3A3A3A"/>
+                </a:solidFill>
+                <a:latin typeface="맑은 고딕"/>
+              </a:rPr>
+              <a:t/>
+            </a:r>
+            <a:r>
+              <a:rPr sz="1300" b="1" dirty="0">
+                <a:solidFill>
+                  <a:srgbClr val="3A3A3A"/>
+                </a:solidFill>
+                <a:latin typeface="맑은 고딕"/>
+              </a:rPr>
+              <a:t/>
+            </a:r>
+            <a:r>
+              <a:rPr sz="1300" b="1" dirty="0" err="1">
+                <a:solidFill>
+                  <a:srgbClr val="3A3A3A"/>
+                </a:solidFill>
+                <a:latin typeface="맑은 고딕"/>
+              </a:rPr>
+              <a:t/>
+            </a:r>
+            <a:r>
+              <a:rPr sz="1300" b="1" dirty="0">
+                <a:solidFill>
+                  <a:srgbClr val="3A3A3A"/>
+                </a:solidFill>
+                <a:latin typeface="맑은 고딕"/>
+              </a:rPr>
+              <a:t/>
+            </a:r>
+            <a:r>
+              <a:rPr sz="1300" b="1" dirty="0" err="1">
+                <a:solidFill>
+                  <a:srgbClr val="3A3A3A"/>
+                </a:solidFill>
+                <a:latin typeface="맑은 고딕"/>
+              </a:rPr>
+              <a:t/>
+            </a:r>
+            <a:r>
+              <a:rPr sz="1300" b="1" dirty="0">
+                <a:solidFill>
+                  <a:srgbClr val="3A3A3A"/>
+                </a:solidFill>
+                <a:latin typeface="맑은 고딕"/>
+              </a:rPr>
+              <a:t/>
+            </a:r>
+            <a:r>
+              <a:rPr sz="1300" b="1" dirty="0" err="1">
+                <a:solidFill>
+                  <a:srgbClr val="3A3A3A"/>
+                </a:solidFill>
+                <a:latin typeface="맑은 고딕"/>
+              </a:rPr>
+              <a:t/>
+            </a:r>
+            <a:r>
+              <a:rPr sz="1300" b="1" dirty="0">
+                <a:solidFill>
+                  <a:srgbClr val="3A3A3A"/>
+                </a:solidFill>
+                <a:latin typeface="맑은 고딕"/>
+              </a:rPr>
+              <a:t/>
+            </a:r>
+            <a:r>
+              <a:rPr sz="1300" b="1" dirty="0" err="1">
+                <a:solidFill>
+                  <a:srgbClr val="3A3A3A"/>
+                </a:solidFill>
+                <a:latin typeface="맑은 고딕"/>
+              </a:rPr>
+              <a:t/>
+            </a:r>
+            <a:r>
+              <a:rPr sz="1300" b="1" dirty="0">
+                <a:solidFill>
+                  <a:srgbClr val="3A3A3A"/>
+                </a:solidFill>
+                <a:latin typeface="맑은 고딕"/>
+              </a:rPr>
+              <a:t/>
             </a:r>
           </a:p>
         </p:txBody>
@@ -15179,7 +15605,7 @@
                 </a:solidFill>
                 <a:latin typeface="맑은 고딕"/>
               </a:rPr>
-              <a:t>51.5%</a:t>
+              <a:t>57.4%</a:t>
             </a:r>
             <a:r>
               <a:rPr sz="1200" b="0">
@@ -15188,7 +15614,7 @@
                 </a:solidFill>
                 <a:latin typeface="맑은 고딕"/>
               </a:rPr>
-              <a:t> (연초 38.7%→5월)</a:t>
+              <a:t> (6/30 추정 · 연초 38.7% → 5/13 확정 51.5%)</a:t>
             </a:r>
           </a:p>
         </p:txBody>
@@ -15526,7 +15952,7 @@
                 <a:latin typeface="맑은 고딕"/>
               </a:rPr>
               <a:t>③ 레버리지 종가
-순응매매(±10%→2.6조)</a:t>
+순응매매(±10%→약 8조·글로벌)</a:t>
             </a:r>
           </a:p>
         </p:txBody>
